--- a/@Materi Kuliah/Materi_Statistika_Inferensial/Presentasi_Statistika_Inferensial_Profesional_dari_HTML.pptx
+++ b/@Materi Kuliah/Materi_Statistika_Inferensial/Presentasi_Statistika_Inferensial_Profesional_dari_HTML.pptx
@@ -2,131 +2,36 @@
 <file path=ppt/presentation.xml><?xml version="1.0" encoding="utf-8"?>
 <p:presentation xmlns:p="http://schemas.openxmlformats.org/presentationml/2006/main">
   <p:sldMasterIdLst>
-    <p:sldMasterId xmlns:r="http://schemas.openxmlformats.org/officeDocument/2006/relationships" id="2147483648" r:id="Re83b07e5a87649f6"/>
+    <p:sldMasterId xmlns:r="http://schemas.openxmlformats.org/officeDocument/2006/relationships" id="2147483648" r:id="Rf7d108d38420411e"/>
   </p:sldMasterIdLst>
   <p:notesMasterIdLst>
-    <p:notesMasterId xmlns:r="http://schemas.openxmlformats.org/officeDocument/2006/relationships" r:id="R158bd2484bc74b85"/>
+    <p:notesMasterId xmlns:r="http://schemas.openxmlformats.org/officeDocument/2006/relationships" r:id="R68ec22a6ff9b4569"/>
   </p:notesMasterIdLst>
   <p:sldIdLst>
-    <p:sldId xmlns:r="http://schemas.openxmlformats.org/officeDocument/2006/relationships" id="256" r:id="R5e11cbd00a884ed4"/>
-    <p:sldId xmlns:r="http://schemas.openxmlformats.org/officeDocument/2006/relationships" id="257" r:id="Rc44c8599d9c54a5e"/>
-    <p:sldId xmlns:r="http://schemas.openxmlformats.org/officeDocument/2006/relationships" id="258" r:id="R9bafa448de2c4148"/>
-    <p:sldId xmlns:r="http://schemas.openxmlformats.org/officeDocument/2006/relationships" id="259" r:id="Rfe30311fb79f4045"/>
-    <p:sldId xmlns:r="http://schemas.openxmlformats.org/officeDocument/2006/relationships" id="260" r:id="Rc9bd72467c264f6b"/>
-    <p:sldId xmlns:r="http://schemas.openxmlformats.org/officeDocument/2006/relationships" id="261" r:id="R3a32594c1a2b450f"/>
-    <p:sldId xmlns:r="http://schemas.openxmlformats.org/officeDocument/2006/relationships" id="262" r:id="R06a81733f4974930"/>
-    <p:sldId xmlns:r="http://schemas.openxmlformats.org/officeDocument/2006/relationships" id="263" r:id="R50dc64b2ba00440e"/>
-    <p:sldId xmlns:r="http://schemas.openxmlformats.org/officeDocument/2006/relationships" id="264" r:id="Raf5ebe987e374739"/>
-    <p:sldId xmlns:r="http://schemas.openxmlformats.org/officeDocument/2006/relationships" id="265" r:id="R370c5026e02f4a4c"/>
-    <p:sldId xmlns:r="http://schemas.openxmlformats.org/officeDocument/2006/relationships" id="266" r:id="Recea4d52e88a4e6e"/>
-    <p:sldId xmlns:r="http://schemas.openxmlformats.org/officeDocument/2006/relationships" id="267" r:id="R60747019ef304a4a"/>
-    <p:sldId xmlns:r="http://schemas.openxmlformats.org/officeDocument/2006/relationships" id="268" r:id="R0206aa67a7814cd0"/>
-    <p:sldId xmlns:r="http://schemas.openxmlformats.org/officeDocument/2006/relationships" id="269" r:id="R588c1056ea8941bc"/>
-    <p:sldId xmlns:r="http://schemas.openxmlformats.org/officeDocument/2006/relationships" id="270" r:id="Rf7b843f55aa14cff"/>
-    <p:sldId xmlns:r="http://schemas.openxmlformats.org/officeDocument/2006/relationships" id="271" r:id="R6c3aec57c7d84407"/>
-    <p:sldId xmlns:r="http://schemas.openxmlformats.org/officeDocument/2006/relationships" id="272" r:id="R1ab3694c963d4ee3"/>
-    <p:sldId xmlns:r="http://schemas.openxmlformats.org/officeDocument/2006/relationships" id="273" r:id="R948f17fd1df64081"/>
-    <p:sldId xmlns:r="http://schemas.openxmlformats.org/officeDocument/2006/relationships" id="274" r:id="R41c97e4eb9ea47d5"/>
-    <p:sldId xmlns:r="http://schemas.openxmlformats.org/officeDocument/2006/relationships" id="275" r:id="R3b40a84713c546c0"/>
-    <p:sldId xmlns:r="http://schemas.openxmlformats.org/officeDocument/2006/relationships" id="276" r:id="R9aa838cc4a3d43a7"/>
+    <p:sldId xmlns:r="http://schemas.openxmlformats.org/officeDocument/2006/relationships" id="256" r:id="Rf78b1b024de043e6"/>
+    <p:sldId xmlns:r="http://schemas.openxmlformats.org/officeDocument/2006/relationships" id="257" r:id="R14843badf4514f83"/>
+    <p:sldId xmlns:r="http://schemas.openxmlformats.org/officeDocument/2006/relationships" id="258" r:id="Rd2cc4b314fdf47f9"/>
+    <p:sldId xmlns:r="http://schemas.openxmlformats.org/officeDocument/2006/relationships" id="259" r:id="R95c17772de0b4466"/>
+    <p:sldId xmlns:r="http://schemas.openxmlformats.org/officeDocument/2006/relationships" id="260" r:id="Ra104718f83564ebb"/>
+    <p:sldId xmlns:r="http://schemas.openxmlformats.org/officeDocument/2006/relationships" id="261" r:id="Rbf341ffefdce4c23"/>
+    <p:sldId xmlns:r="http://schemas.openxmlformats.org/officeDocument/2006/relationships" id="262" r:id="R6aa8c61bfba746ba"/>
+    <p:sldId xmlns:r="http://schemas.openxmlformats.org/officeDocument/2006/relationships" id="263" r:id="R86302bf731e24139"/>
+    <p:sldId xmlns:r="http://schemas.openxmlformats.org/officeDocument/2006/relationships" id="264" r:id="R12f69783dd8c43dc"/>
+    <p:sldId xmlns:r="http://schemas.openxmlformats.org/officeDocument/2006/relationships" id="265" r:id="Rc5fe5a4f61174330"/>
+    <p:sldId xmlns:r="http://schemas.openxmlformats.org/officeDocument/2006/relationships" id="266" r:id="R850d53b6237a493e"/>
+    <p:sldId xmlns:r="http://schemas.openxmlformats.org/officeDocument/2006/relationships" id="267" r:id="Rbb910b636dba4d43"/>
+    <p:sldId xmlns:r="http://schemas.openxmlformats.org/officeDocument/2006/relationships" id="268" r:id="Rdfb9fb28c60d44b6"/>
+    <p:sldId xmlns:r="http://schemas.openxmlformats.org/officeDocument/2006/relationships" id="269" r:id="R36205706278c4626"/>
+    <p:sldId xmlns:r="http://schemas.openxmlformats.org/officeDocument/2006/relationships" id="270" r:id="R7e934e4608e54b87"/>
+    <p:sldId xmlns:r="http://schemas.openxmlformats.org/officeDocument/2006/relationships" id="271" r:id="R3e910fa5cb4646ae"/>
+    <p:sldId xmlns:r="http://schemas.openxmlformats.org/officeDocument/2006/relationships" id="272" r:id="R686ea00b929c4a04"/>
+    <p:sldId xmlns:r="http://schemas.openxmlformats.org/officeDocument/2006/relationships" id="273" r:id="R1e24ca2cb3714ce1"/>
+    <p:sldId xmlns:r="http://schemas.openxmlformats.org/officeDocument/2006/relationships" id="274" r:id="Re2d5d4d728c04bb5"/>
+    <p:sldId xmlns:r="http://schemas.openxmlformats.org/officeDocument/2006/relationships" id="275" r:id="R7659803ee2b3406a"/>
+    <p:sldId xmlns:r="http://schemas.openxmlformats.org/officeDocument/2006/relationships" id="276" r:id="R5e9d7cb1be324c29"/>
   </p:sldIdLst>
   <p:sldSz cx="12192000" cy="6858000"/>
   <p:notesSz cx="6858000" cy="9144000"/>
-  <p:defaultTextStyle>
-    <a:defPPr xmlns:a="http://schemas.openxmlformats.org/drawingml/2006/main">
-      <a:defRPr lang="en-US"/>
-    </a:defPPr>
-    <a:lvl1pPr xmlns:a="http://schemas.openxmlformats.org/drawingml/2006/main" marL="0" indent="0" algn="l" defTabSz="914400">
-      <a:defRPr sz="1800" kern="1200">
-        <a:solidFill>
-          <a:schemeClr val="tx1"/>
-        </a:solidFill>
-        <a:latin typeface="+mn-lt"/>
-        <a:ea typeface="+mn-ea"/>
-        <a:cs typeface="+mn-cs"/>
-      </a:defRPr>
-    </a:lvl1pPr>
-    <a:lvl2pPr xmlns:a="http://schemas.openxmlformats.org/drawingml/2006/main" marL="457200" indent="0" algn="l" defTabSz="914400">
-      <a:defRPr sz="1800" kern="1200">
-        <a:solidFill>
-          <a:schemeClr val="tx1"/>
-        </a:solidFill>
-        <a:latin typeface="+mn-lt"/>
-        <a:ea typeface="+mn-ea"/>
-        <a:cs typeface="+mn-cs"/>
-      </a:defRPr>
-    </a:lvl2pPr>
-    <a:lvl3pPr xmlns:a="http://schemas.openxmlformats.org/drawingml/2006/main" marL="914400" indent="0" algn="l" defTabSz="914400">
-      <a:defRPr sz="1800" kern="1200">
-        <a:solidFill>
-          <a:schemeClr val="tx1"/>
-        </a:solidFill>
-        <a:latin typeface="+mn-lt"/>
-        <a:ea typeface="+mn-ea"/>
-        <a:cs typeface="+mn-cs"/>
-      </a:defRPr>
-    </a:lvl3pPr>
-    <a:lvl4pPr xmlns:a="http://schemas.openxmlformats.org/drawingml/2006/main" marL="1371600" indent="0" algn="l" defTabSz="914400">
-      <a:defRPr sz="1800" kern="1200">
-        <a:solidFill>
-          <a:schemeClr val="tx1"/>
-        </a:solidFill>
-        <a:latin typeface="+mn-lt"/>
-        <a:ea typeface="+mn-ea"/>
-        <a:cs typeface="+mn-cs"/>
-      </a:defRPr>
-    </a:lvl4pPr>
-    <a:lvl5pPr xmlns:a="http://schemas.openxmlformats.org/drawingml/2006/main" marL="1828800" indent="0" algn="l" defTabSz="914400">
-      <a:defRPr sz="1800" kern="1200">
-        <a:solidFill>
-          <a:schemeClr val="tx1"/>
-        </a:solidFill>
-        <a:latin typeface="+mn-lt"/>
-        <a:ea typeface="+mn-ea"/>
-        <a:cs typeface="+mn-cs"/>
-      </a:defRPr>
-    </a:lvl5pPr>
-    <a:lvl6pPr xmlns:a="http://schemas.openxmlformats.org/drawingml/2006/main" marL="2286000" indent="0" algn="l" defTabSz="914400">
-      <a:defRPr sz="1800" kern="1200">
-        <a:solidFill>
-          <a:schemeClr val="tx1"/>
-        </a:solidFill>
-        <a:latin typeface="+mn-lt"/>
-        <a:ea typeface="+mn-ea"/>
-        <a:cs typeface="+mn-cs"/>
-      </a:defRPr>
-    </a:lvl6pPr>
-    <a:lvl7pPr xmlns:a="http://schemas.openxmlformats.org/drawingml/2006/main" marL="2743200" indent="0" algn="l" defTabSz="914400">
-      <a:defRPr sz="1800" kern="1200">
-        <a:solidFill>
-          <a:schemeClr val="tx1"/>
-        </a:solidFill>
-        <a:latin typeface="+mn-lt"/>
-        <a:ea typeface="+mn-ea"/>
-        <a:cs typeface="+mn-cs"/>
-      </a:defRPr>
-    </a:lvl7pPr>
-    <a:lvl8pPr xmlns:a="http://schemas.openxmlformats.org/drawingml/2006/main" marL="3200400" indent="0" algn="l" defTabSz="914400">
-      <a:defRPr sz="1800" kern="1200">
-        <a:solidFill>
-          <a:schemeClr val="tx1"/>
-        </a:solidFill>
-        <a:latin typeface="+mn-lt"/>
-        <a:ea typeface="+mn-ea"/>
-        <a:cs typeface="+mn-cs"/>
-      </a:defRPr>
-    </a:lvl8pPr>
-    <a:lvl9pPr xmlns:a="http://schemas.openxmlformats.org/drawingml/2006/main" marL="3657600" indent="0" algn="l" defTabSz="914400">
-      <a:defRPr sz="1800" kern="1200">
-        <a:solidFill>
-          <a:schemeClr val="tx1"/>
-        </a:solidFill>
-        <a:latin typeface="+mn-lt"/>
-        <a:ea typeface="+mn-ea"/>
-        <a:cs typeface="+mn-cs"/>
-      </a:defRPr>
-    </a:lvl9pPr>
-  </p:defaultTextStyle>
 </p:presentation>
 </file>
 
@@ -1453,7 +1358,26 @@
         <p:txBody>
           <a:bodyPr xmlns:a="http://schemas.openxmlformats.org/drawingml/2006/main"/>
           <a:lstStyle xmlns:a="http://schemas.openxmlformats.org/drawingml/2006/main"/>
-          <a:p xmlns:a="http://schemas.openxmlformats.org/drawingml/2006/main"/>
+          <a:p xmlns:a="http://schemas.openxmlformats.org/drawingml/2006/main">
+            <a:r>
+              <a:t>[Sources]</a:t>
+            </a:r>
+          </a:p>
+          <a:p xmlns:a="http://schemas.openxmlformats.org/drawingml/2006/main">
+            <a:r>
+              <a:t>- RPS mata kuliah Revisi AI 2026, Program Studi S2 Statistika Terapan FMIPA Universitas Padjadjaran.</a:t>
+            </a:r>
+          </a:p>
+          <a:p xmlns:a="http://schemas.openxmlformats.org/drawingml/2006/main">
+            <a:r>
+              <a:t>[/Sources]</a:t>
+            </a:r>
+          </a:p>
+          <a:p xmlns:a="http://schemas.openxmlformats.org/drawingml/2006/main">
+            <a:r>
+              <a:t>Penutup: CPL tetap. AI adalah akselerator ketercapaian CPMK/Sub-CPMK, bukan pengganti penalaran statistika. Tekankan kewajiban prompt log ringkas, sumber, kode/notebook reproducible, validasi, dan audit trail.</a:t>
+            </a:r>
+          </a:p>
         </p:txBody>
       </p:sp>
       <p:sp>
@@ -2010,8 +1934,8 @@
   </p:cSld>
   <p:clrMap bg1="lt1" tx1="dk1" bg2="lt2" tx2="dk2" accent1="accent1" accent2="accent2" accent3="accent3" accent4="accent4" accent5="accent5" accent6="accent6" hlink="hlink" folHlink="folHlink"/>
   <p:sldLayoutIdLst>
-    <p:sldLayoutId xmlns:r="http://schemas.openxmlformats.org/officeDocument/2006/relationships" id="2147483649" r:id="R2721906e98294f33"/>
-    <p:sldLayoutId xmlns:r="http://schemas.openxmlformats.org/officeDocument/2006/relationships" id="2147483650" r:id="R344631b551934f93"/>
+    <p:sldLayoutId xmlns:r="http://schemas.openxmlformats.org/officeDocument/2006/relationships" id="2147483649" r:id="R84ecefa9a4a943e4"/>
+    <p:sldLayoutId xmlns:r="http://schemas.openxmlformats.org/officeDocument/2006/relationships" id="2147483650" r:id="R2d91a9cbae3a4a62"/>
   </p:sldLayoutIdLst>
   <p:hf sldNum="0" hdr="0" ftr="0" dt="0"/>
   <p:txStyles>
@@ -2577,7 +2501,7 @@
           <p:nvPr/>
         </p:nvPicPr>
         <p:blipFill>
-          <a:blip xmlns:r="http://schemas.openxmlformats.org/officeDocument/2006/relationships" xmlns:a="http://schemas.openxmlformats.org/drawingml/2006/main" r:embed="Rfaf0018079b24408"/>
+          <a:blip xmlns:r="http://schemas.openxmlformats.org/officeDocument/2006/relationships" xmlns:a="http://schemas.openxmlformats.org/drawingml/2006/main" r:embed="Rb5a9214681cd4d65"/>
           <a:stretch xmlns:a="http://schemas.openxmlformats.org/drawingml/2006/main">
             <a:fillRect l="0" t="0" r="0" b="0"/>
           </a:stretch>
@@ -2723,7 +2647,7 @@
           <p:nvPr/>
         </p:nvPicPr>
         <p:blipFill>
-          <a:blip xmlns:r="http://schemas.openxmlformats.org/officeDocument/2006/relationships" xmlns:a="http://schemas.openxmlformats.org/drawingml/2006/main" r:embed="R338e798a2c2642df"/>
+          <a:blip xmlns:r="http://schemas.openxmlformats.org/officeDocument/2006/relationships" xmlns:a="http://schemas.openxmlformats.org/drawingml/2006/main" r:embed="R9e59e246c92f4d2c"/>
           <a:stretch xmlns:a="http://schemas.openxmlformats.org/drawingml/2006/main">
             <a:fillRect l="0" t="0" r="0" b="0"/>
           </a:stretch>
@@ -3345,7 +3269,7 @@
           <p:nvPr/>
         </p:nvPicPr>
         <p:blipFill>
-          <a:blip xmlns:r="http://schemas.openxmlformats.org/officeDocument/2006/relationships" xmlns:a="http://schemas.openxmlformats.org/drawingml/2006/main" r:embed="R43a55623f2404c03"/>
+          <a:blip xmlns:r="http://schemas.openxmlformats.org/officeDocument/2006/relationships" xmlns:a="http://schemas.openxmlformats.org/drawingml/2006/main" r:embed="R8dcf24caa4f946b5"/>
           <a:stretch xmlns:a="http://schemas.openxmlformats.org/drawingml/2006/main">
             <a:fillRect l="0" t="0" r="0" b="0"/>
           </a:stretch>
@@ -5495,7 +5419,7 @@
           <p:nvPr/>
         </p:nvPicPr>
         <p:blipFill>
-          <a:blip xmlns:r="http://schemas.openxmlformats.org/officeDocument/2006/relationships" xmlns:a="http://schemas.openxmlformats.org/drawingml/2006/main" r:embed="R4c6a7fb3bad7435f"/>
+          <a:blip xmlns:r="http://schemas.openxmlformats.org/officeDocument/2006/relationships" xmlns:a="http://schemas.openxmlformats.org/drawingml/2006/main" r:embed="R3f559a58a41246da"/>
           <a:stretch xmlns:a="http://schemas.openxmlformats.org/drawingml/2006/main">
             <a:fillRect l="0" t="0" r="0" b="0"/>
           </a:stretch>
@@ -5774,7 +5698,7 @@
           <p:nvPr/>
         </p:nvPicPr>
         <p:blipFill>
-          <a:blip xmlns:r="http://schemas.openxmlformats.org/officeDocument/2006/relationships" xmlns:a="http://schemas.openxmlformats.org/drawingml/2006/main" r:embed="Rcec6c7c6e320485b"/>
+          <a:blip xmlns:r="http://schemas.openxmlformats.org/officeDocument/2006/relationships" xmlns:a="http://schemas.openxmlformats.org/drawingml/2006/main" r:embed="R301584a9166d4709"/>
           <a:stretch xmlns:a="http://schemas.openxmlformats.org/drawingml/2006/main">
             <a:fillRect l="0" t="0" r="0" b="0"/>
           </a:stretch>
@@ -7308,7 +7232,7 @@
           <p:nvPr/>
         </p:nvPicPr>
         <p:blipFill>
-          <a:blip xmlns:r="http://schemas.openxmlformats.org/officeDocument/2006/relationships" xmlns:a="http://schemas.openxmlformats.org/drawingml/2006/main" r:embed="Rcc0f1f55fd054cfd"/>
+          <a:blip xmlns:r="http://schemas.openxmlformats.org/officeDocument/2006/relationships" xmlns:a="http://schemas.openxmlformats.org/drawingml/2006/main" r:embed="R502f2847cd234559"/>
           <a:stretch xmlns:a="http://schemas.openxmlformats.org/drawingml/2006/main">
             <a:fillRect l="0" t="0" r="0" b="0"/>
           </a:stretch>
@@ -8477,7 +8401,7 @@
           <p:nvPr/>
         </p:nvPicPr>
         <p:blipFill>
-          <a:blip xmlns:r="http://schemas.openxmlformats.org/officeDocument/2006/relationships" xmlns:a="http://schemas.openxmlformats.org/drawingml/2006/main" r:embed="R77907559f5ad4295"/>
+          <a:blip xmlns:r="http://schemas.openxmlformats.org/officeDocument/2006/relationships" xmlns:a="http://schemas.openxmlformats.org/drawingml/2006/main" r:embed="R74d21634bbbb4a97"/>
           <a:stretch xmlns:a="http://schemas.openxmlformats.org/drawingml/2006/main">
             <a:fillRect l="0" t="0" r="0" b="0"/>
           </a:stretch>
@@ -9704,7 +9628,7 @@
           <p:nvPr/>
         </p:nvPicPr>
         <p:blipFill>
-          <a:blip xmlns:r="http://schemas.openxmlformats.org/officeDocument/2006/relationships" xmlns:a="http://schemas.openxmlformats.org/drawingml/2006/main" r:embed="Rb523e64b67ca4aff"/>
+          <a:blip xmlns:r="http://schemas.openxmlformats.org/officeDocument/2006/relationships" xmlns:a="http://schemas.openxmlformats.org/drawingml/2006/main" r:embed="Rcf533d3819334dab"/>
           <a:stretch xmlns:a="http://schemas.openxmlformats.org/drawingml/2006/main">
             <a:fillRect l="0" t="0" r="0" b="0"/>
           </a:stretch>
@@ -10909,7 +10833,7 @@
           <p:nvPr/>
         </p:nvPicPr>
         <p:blipFill>
-          <a:blip xmlns:r="http://schemas.openxmlformats.org/officeDocument/2006/relationships" xmlns:a="http://schemas.openxmlformats.org/drawingml/2006/main" r:embed="R5d3d0c7ff8264e44"/>
+          <a:blip xmlns:r="http://schemas.openxmlformats.org/officeDocument/2006/relationships" xmlns:a="http://schemas.openxmlformats.org/drawingml/2006/main" r:embed="Ra7e02f190c464def"/>
           <a:stretch xmlns:a="http://schemas.openxmlformats.org/drawingml/2006/main">
             <a:fillRect l="0" t="0" r="0" b="0"/>
           </a:stretch>
@@ -11188,7 +11112,7 @@
           <p:nvPr/>
         </p:nvPicPr>
         <p:blipFill>
-          <a:blip xmlns:r="http://schemas.openxmlformats.org/officeDocument/2006/relationships" xmlns:a="http://schemas.openxmlformats.org/drawingml/2006/main" r:embed="R9fe0fa44b9e14c0b"/>
+          <a:blip xmlns:r="http://schemas.openxmlformats.org/officeDocument/2006/relationships" xmlns:a="http://schemas.openxmlformats.org/drawingml/2006/main" r:embed="R252826dc3e294f92"/>
           <a:stretch xmlns:a="http://schemas.openxmlformats.org/drawingml/2006/main">
             <a:fillRect l="0" t="0" r="0" b="0"/>
           </a:stretch>
@@ -12733,7 +12657,7 @@
           <p:nvPr/>
         </p:nvPicPr>
         <p:blipFill>
-          <a:blip xmlns:r="http://schemas.openxmlformats.org/officeDocument/2006/relationships" xmlns:a="http://schemas.openxmlformats.org/drawingml/2006/main" r:embed="Rb21ec0c78c3247f2"/>
+          <a:blip xmlns:r="http://schemas.openxmlformats.org/officeDocument/2006/relationships" xmlns:a="http://schemas.openxmlformats.org/drawingml/2006/main" r:embed="R0970e88b326c4971"/>
           <a:stretch xmlns:a="http://schemas.openxmlformats.org/drawingml/2006/main">
             <a:fillRect l="0" t="0" r="0" b="0"/>
           </a:stretch>
@@ -14750,7 +14674,7 @@
           <p:nvPr/>
         </p:nvPicPr>
         <p:blipFill>
-          <a:blip xmlns:r="http://schemas.openxmlformats.org/officeDocument/2006/relationships" xmlns:a="http://schemas.openxmlformats.org/drawingml/2006/main" r:embed="Rf3f81594ef624a8c"/>
+          <a:blip xmlns:r="http://schemas.openxmlformats.org/officeDocument/2006/relationships" xmlns:a="http://schemas.openxmlformats.org/drawingml/2006/main" r:embed="R188f2e27f05941a6"/>
           <a:stretch xmlns:a="http://schemas.openxmlformats.org/drawingml/2006/main">
             <a:fillRect l="0" t="0" r="0" b="0"/>
           </a:stretch>
@@ -15977,7 +15901,7 @@
           <p:nvPr/>
         </p:nvPicPr>
         <p:blipFill>
-          <a:blip xmlns:r="http://schemas.openxmlformats.org/officeDocument/2006/relationships" xmlns:a="http://schemas.openxmlformats.org/drawingml/2006/main" r:embed="Re6477d0158dc46f0"/>
+          <a:blip xmlns:r="http://schemas.openxmlformats.org/officeDocument/2006/relationships" xmlns:a="http://schemas.openxmlformats.org/drawingml/2006/main" r:embed="R6cc7e6084bee4f08"/>
           <a:stretch xmlns:a="http://schemas.openxmlformats.org/drawingml/2006/main">
             <a:fillRect l="0" t="0" r="0" b="0"/>
           </a:stretch>
@@ -17118,7 +17042,7 @@
           <p:nvPr/>
         </p:nvPicPr>
         <p:blipFill>
-          <a:blip xmlns:r="http://schemas.openxmlformats.org/officeDocument/2006/relationships" xmlns:a="http://schemas.openxmlformats.org/drawingml/2006/main" r:embed="Re718aa0e271446c4"/>
+          <a:blip xmlns:r="http://schemas.openxmlformats.org/officeDocument/2006/relationships" xmlns:a="http://schemas.openxmlformats.org/drawingml/2006/main" r:embed="R872ab347ba1d4464"/>
           <a:stretch xmlns:a="http://schemas.openxmlformats.org/drawingml/2006/main">
             <a:fillRect l="0" t="0" r="0" b="0"/>
           </a:stretch>
@@ -18583,7 +18507,7 @@
           <p:nvPr/>
         </p:nvPicPr>
         <p:blipFill>
-          <a:blip xmlns:r="http://schemas.openxmlformats.org/officeDocument/2006/relationships" xmlns:a="http://schemas.openxmlformats.org/drawingml/2006/main" r:embed="R75360a4509514069"/>
+          <a:blip xmlns:r="http://schemas.openxmlformats.org/officeDocument/2006/relationships" xmlns:a="http://schemas.openxmlformats.org/drawingml/2006/main" r:embed="Rcb9c9ecc28074d7e"/>
           <a:stretch xmlns:a="http://schemas.openxmlformats.org/drawingml/2006/main">
             <a:fillRect l="0" t="0" r="0" b="0"/>
           </a:stretch>
@@ -18729,7 +18653,7 @@
           <p:nvPr/>
         </p:nvPicPr>
         <p:blipFill>
-          <a:blip xmlns:r="http://schemas.openxmlformats.org/officeDocument/2006/relationships" xmlns:a="http://schemas.openxmlformats.org/drawingml/2006/main" r:embed="R86d539ecf2274dfa"/>
+          <a:blip xmlns:r="http://schemas.openxmlformats.org/officeDocument/2006/relationships" xmlns:a="http://schemas.openxmlformats.org/drawingml/2006/main" r:embed="R54fa5f1128834100"/>
           <a:stretch xmlns:a="http://schemas.openxmlformats.org/drawingml/2006/main">
             <a:fillRect l="0" t="0" r="0" b="0"/>
           </a:stretch>
@@ -18833,7 +18757,7 @@
                 <a:ea typeface="Aptos Display"/>
                 <a:cs typeface="Aptos Display"/>
               </a:rPr>
-              <a:t>Dari data menuju</a:t>
+              <a:t>AI mempercepat proses,</a:t>
             </a:r>
           </a:p>
           <a:p xmlns:a="http://schemas.openxmlformats.org/drawingml/2006/main">
@@ -18849,7 +18773,7 @@
                 <a:ea typeface="Aptos Display"/>
                 <a:cs typeface="Aptos Display"/>
               </a:rPr>
-              <a:t>keputusan yang dapat diuji</a:t>
+              <a:t>penalaran tetap memimpin</a:t>
             </a:r>
           </a:p>
         </p:txBody>
@@ -18916,7 +18840,7 @@
         </p:spPr>
         <p:txBody>
           <a:bodyPr xmlns:a="http://schemas.openxmlformats.org/drawingml/2006/main" wrap="square" lIns="635" tIns="635" rIns="635" bIns="635" anchor="t">
-            <a:normAutofit fontScale="100000"/>
+            <a:normAutofit fontScale="93620"/>
           </a:bodyPr>
           <a:lstStyle xmlns:a="http://schemas.openxmlformats.org/drawingml/2006/main"/>
           <a:p xmlns:a="http://schemas.openxmlformats.org/drawingml/2006/main">
@@ -18932,7 +18856,7 @@
                 <a:ea typeface="Aptos"/>
                 <a:cs typeface="Aptos"/>
               </a:rPr>
-              <a:t>Statistika Inferensial menghubungkan teori, data, metode, validasi, dan komunikasi untuk menghasilkan keputusan yang sahih, dapat direplikasi, dan bertanggung jawab.</a:t>
+              <a:t>Statistika Inferensial memadukan teori, data, komputasi, validasi, dan komunikasi. AI mempercepat eksplorasi dan pemeriksaan awal; mahasiswa tetap memverifikasi asumsi, kode, hasil numerik, ketidakpastian, sumber, dan dampak sebelum mengambil keputusan.</a:t>
             </a:r>
           </a:p>
         </p:txBody>
@@ -19102,7 +19026,7 @@
           <p:nvPr/>
         </p:nvPicPr>
         <p:blipFill>
-          <a:blip xmlns:r="http://schemas.openxmlformats.org/officeDocument/2006/relationships" xmlns:a="http://schemas.openxmlformats.org/drawingml/2006/main" r:embed="Rbd20988c506d4686"/>
+          <a:blip xmlns:r="http://schemas.openxmlformats.org/officeDocument/2006/relationships" xmlns:a="http://schemas.openxmlformats.org/drawingml/2006/main" r:embed="Ra3f75cb1d9bd4a78"/>
           <a:stretch xmlns:a="http://schemas.openxmlformats.org/drawingml/2006/main">
             <a:fillRect l="0" t="0" r="0" b="0"/>
           </a:stretch>
@@ -20233,7 +20157,7 @@
           <p:nvPr/>
         </p:nvPicPr>
         <p:blipFill>
-          <a:blip xmlns:r="http://schemas.openxmlformats.org/officeDocument/2006/relationships" xmlns:a="http://schemas.openxmlformats.org/drawingml/2006/main" r:embed="Rfc4f40dbc2df4e55"/>
+          <a:blip xmlns:r="http://schemas.openxmlformats.org/officeDocument/2006/relationships" xmlns:a="http://schemas.openxmlformats.org/drawingml/2006/main" r:embed="R8b76062b4cd54285"/>
           <a:stretch xmlns:a="http://schemas.openxmlformats.org/drawingml/2006/main">
             <a:fillRect l="0" t="0" r="0" b="0"/>
           </a:stretch>
@@ -22337,7 +22261,7 @@
           <p:nvPr/>
         </p:nvPicPr>
         <p:blipFill>
-          <a:blip xmlns:r="http://schemas.openxmlformats.org/officeDocument/2006/relationships" xmlns:a="http://schemas.openxmlformats.org/drawingml/2006/main" r:embed="R75abd5e292234e54"/>
+          <a:blip xmlns:r="http://schemas.openxmlformats.org/officeDocument/2006/relationships" xmlns:a="http://schemas.openxmlformats.org/drawingml/2006/main" r:embed="Re3b45d657e08452e"/>
           <a:stretch xmlns:a="http://schemas.openxmlformats.org/drawingml/2006/main">
             <a:fillRect l="0" t="0" r="0" b="0"/>
           </a:stretch>
@@ -23619,7 +23543,7 @@
           <p:nvPr/>
         </p:nvPicPr>
         <p:blipFill>
-          <a:blip xmlns:r="http://schemas.openxmlformats.org/officeDocument/2006/relationships" xmlns:a="http://schemas.openxmlformats.org/drawingml/2006/main" r:embed="Rbd7b30a244404697"/>
+          <a:blip xmlns:r="http://schemas.openxmlformats.org/officeDocument/2006/relationships" xmlns:a="http://schemas.openxmlformats.org/drawingml/2006/main" r:embed="Rbec382375a45487a"/>
           <a:stretch xmlns:a="http://schemas.openxmlformats.org/drawingml/2006/main">
             <a:fillRect l="0" t="0" r="0" b="0"/>
           </a:stretch>
@@ -23898,7 +23822,7 @@
           <p:nvPr/>
         </p:nvPicPr>
         <p:blipFill>
-          <a:blip xmlns:r="http://schemas.openxmlformats.org/officeDocument/2006/relationships" xmlns:a="http://schemas.openxmlformats.org/drawingml/2006/main" r:embed="R4b74959db6334c85"/>
+          <a:blip xmlns:r="http://schemas.openxmlformats.org/officeDocument/2006/relationships" xmlns:a="http://schemas.openxmlformats.org/drawingml/2006/main" r:embed="Rb497a58a2b6c4850"/>
           <a:stretch xmlns:a="http://schemas.openxmlformats.org/drawingml/2006/main">
             <a:fillRect l="0" t="0" r="0" b="0"/>
           </a:stretch>
@@ -25978,7 +25902,7 @@
           <p:nvPr/>
         </p:nvPicPr>
         <p:blipFill>
-          <a:blip xmlns:r="http://schemas.openxmlformats.org/officeDocument/2006/relationships" xmlns:a="http://schemas.openxmlformats.org/drawingml/2006/main" r:embed="R624f9f2d0a6c4c04"/>
+          <a:blip xmlns:r="http://schemas.openxmlformats.org/officeDocument/2006/relationships" xmlns:a="http://schemas.openxmlformats.org/drawingml/2006/main" r:embed="Ra34a4b0b3c9f433f"/>
           <a:stretch xmlns:a="http://schemas.openxmlformats.org/drawingml/2006/main">
             <a:fillRect l="0" t="0" r="0" b="0"/>
           </a:stretch>
@@ -27391,7 +27315,7 @@
           <p:nvPr/>
         </p:nvPicPr>
         <p:blipFill>
-          <a:blip xmlns:r="http://schemas.openxmlformats.org/officeDocument/2006/relationships" xmlns:a="http://schemas.openxmlformats.org/drawingml/2006/main" r:embed="R4eebdbd378c74cde"/>
+          <a:blip xmlns:r="http://schemas.openxmlformats.org/officeDocument/2006/relationships" xmlns:a="http://schemas.openxmlformats.org/drawingml/2006/main" r:embed="R923416fb3e474841"/>
           <a:stretch xmlns:a="http://schemas.openxmlformats.org/drawingml/2006/main">
             <a:fillRect l="0" t="0" r="0" b="0"/>
           </a:stretch>
